--- a/TurtleBot3 Burger Nav2 Project.pptx
+++ b/TurtleBot3 Burger Nav2 Project.pptx
@@ -106,6 +106,11 @@
       </a:defRPr>
     </a:lvl9pPr>
   </p:defaultTextStyle>
+  <p:extLst>
+    <p:ext uri="{EFAFB233-063F-42B5-8137-9DF3F51BA10A}">
+      <p15:sldGuideLst xmlns:p15="http://schemas.microsoft.com/office/powerpoint/2012/main"/>
+    </p:ext>
+  </p:extLst>
 </p:presentation>
 </file>
 
@@ -258,7 +263,7 @@
           <a:p>
             <a:fld id="{6D11925D-4BB5-4753-9F7D-BFAA262BBE24}" type="datetimeFigureOut">
               <a:rPr lang="en-DE" smtClean="0"/>
-              <a:t>21/05/2026</a:t>
+              <a:t>25/05/2026</a:t>
             </a:fld>
             <a:endParaRPr lang="en-DE"/>
           </a:p>
@@ -458,7 +463,7 @@
           <a:p>
             <a:fld id="{6D11925D-4BB5-4753-9F7D-BFAA262BBE24}" type="datetimeFigureOut">
               <a:rPr lang="en-DE" smtClean="0"/>
-              <a:t>21/05/2026</a:t>
+              <a:t>25/05/2026</a:t>
             </a:fld>
             <a:endParaRPr lang="en-DE"/>
           </a:p>
@@ -668,7 +673,7 @@
           <a:p>
             <a:fld id="{6D11925D-4BB5-4753-9F7D-BFAA262BBE24}" type="datetimeFigureOut">
               <a:rPr lang="en-DE" smtClean="0"/>
-              <a:t>21/05/2026</a:t>
+              <a:t>25/05/2026</a:t>
             </a:fld>
             <a:endParaRPr lang="en-DE"/>
           </a:p>
@@ -868,7 +873,7 @@
           <a:p>
             <a:fld id="{6D11925D-4BB5-4753-9F7D-BFAA262BBE24}" type="datetimeFigureOut">
               <a:rPr lang="en-DE" smtClean="0"/>
-              <a:t>21/05/2026</a:t>
+              <a:t>25/05/2026</a:t>
             </a:fld>
             <a:endParaRPr lang="en-DE"/>
           </a:p>
@@ -1144,7 +1149,7 @@
           <a:p>
             <a:fld id="{6D11925D-4BB5-4753-9F7D-BFAA262BBE24}" type="datetimeFigureOut">
               <a:rPr lang="en-DE" smtClean="0"/>
-              <a:t>21/05/2026</a:t>
+              <a:t>25/05/2026</a:t>
             </a:fld>
             <a:endParaRPr lang="en-DE"/>
           </a:p>
@@ -1412,7 +1417,7 @@
           <a:p>
             <a:fld id="{6D11925D-4BB5-4753-9F7D-BFAA262BBE24}" type="datetimeFigureOut">
               <a:rPr lang="en-DE" smtClean="0"/>
-              <a:t>21/05/2026</a:t>
+              <a:t>25/05/2026</a:t>
             </a:fld>
             <a:endParaRPr lang="en-DE"/>
           </a:p>
@@ -1827,7 +1832,7 @@
           <a:p>
             <a:fld id="{6D11925D-4BB5-4753-9F7D-BFAA262BBE24}" type="datetimeFigureOut">
               <a:rPr lang="en-DE" smtClean="0"/>
-              <a:t>21/05/2026</a:t>
+              <a:t>25/05/2026</a:t>
             </a:fld>
             <a:endParaRPr lang="en-DE"/>
           </a:p>
@@ -1969,7 +1974,7 @@
           <a:p>
             <a:fld id="{6D11925D-4BB5-4753-9F7D-BFAA262BBE24}" type="datetimeFigureOut">
               <a:rPr lang="en-DE" smtClean="0"/>
-              <a:t>21/05/2026</a:t>
+              <a:t>25/05/2026</a:t>
             </a:fld>
             <a:endParaRPr lang="en-DE"/>
           </a:p>
@@ -2082,7 +2087,7 @@
           <a:p>
             <a:fld id="{6D11925D-4BB5-4753-9F7D-BFAA262BBE24}" type="datetimeFigureOut">
               <a:rPr lang="en-DE" smtClean="0"/>
-              <a:t>21/05/2026</a:t>
+              <a:t>25/05/2026</a:t>
             </a:fld>
             <a:endParaRPr lang="en-DE"/>
           </a:p>
@@ -2395,7 +2400,7 @@
           <a:p>
             <a:fld id="{6D11925D-4BB5-4753-9F7D-BFAA262BBE24}" type="datetimeFigureOut">
               <a:rPr lang="en-DE" smtClean="0"/>
-              <a:t>21/05/2026</a:t>
+              <a:t>25/05/2026</a:t>
             </a:fld>
             <a:endParaRPr lang="en-DE"/>
           </a:p>
@@ -2684,7 +2689,7 @@
           <a:p>
             <a:fld id="{6D11925D-4BB5-4753-9F7D-BFAA262BBE24}" type="datetimeFigureOut">
               <a:rPr lang="en-DE" smtClean="0"/>
-              <a:t>21/05/2026</a:t>
+              <a:t>25/05/2026</a:t>
             </a:fld>
             <a:endParaRPr lang="en-DE"/>
           </a:p>
@@ -2927,7 +2932,7 @@
           <a:p>
             <a:fld id="{6D11925D-4BB5-4753-9F7D-BFAA262BBE24}" type="datetimeFigureOut">
               <a:rPr lang="en-DE" smtClean="0"/>
-              <a:t>21/05/2026</a:t>
+              <a:t>25/05/2026</a:t>
             </a:fld>
             <a:endParaRPr lang="en-DE"/>
           </a:p>
@@ -21271,21 +21276,50 @@
         </p:nvSpPr>
         <p:spPr>
           <a:xfrm>
-            <a:off x="1137034" y="609597"/>
-            <a:ext cx="9392421" cy="1330841"/>
+            <a:off x="61368" y="-27459"/>
+            <a:ext cx="8340065" cy="1806433"/>
           </a:xfrm>
         </p:spPr>
         <p:txBody>
           <a:bodyPr>
-            <a:normAutofit/>
+            <a:noAutofit/>
           </a:bodyPr>
           <a:lstStyle/>
           <a:p>
+            <a:br>
+              <a:rPr lang="en-US" sz="1800" b="1" dirty="0"/>
+            </a:br>
             <a:r>
-              <a:rPr lang="en-US"/>
-              <a:t>Multi-Robot Formation &amp; Navigation Overview</a:t>
+              <a:rPr lang="en-US" sz="1800" b="1" dirty="0"/>
+              <a:t>Project Title</a:t>
             </a:r>
-            <a:endParaRPr lang="en-DE"/>
+            <a:br>
+              <a:rPr lang="en-US" sz="1800" b="1" dirty="0"/>
+            </a:br>
+            <a:r>
+              <a:rPr lang="en-US" sz="1800" dirty="0"/>
+              <a:t>Multi-Robot TurtleBot3 Burger Leader–Follower System in a Simulated Environment</a:t>
+            </a:r>
+            <a:br>
+              <a:rPr lang="en-US" sz="1800" dirty="0"/>
+            </a:br>
+            <a:br>
+              <a:rPr lang="en-US" sz="1800" dirty="0"/>
+            </a:br>
+            <a:r>
+              <a:rPr lang="en-US" sz="1800" b="1" dirty="0"/>
+              <a:t> Statement of Work (Scope &amp; Deliverables)</a:t>
+            </a:r>
+            <a:br>
+              <a:rPr lang="en-US" sz="1800" dirty="0"/>
+            </a:br>
+            <a:br>
+              <a:rPr lang="de-DE" sz="1800" b="1" dirty="0"/>
+            </a:br>
+            <a:br>
+              <a:rPr lang="en-US" sz="1800" b="1" dirty="0"/>
+            </a:br>
+            <a:endParaRPr lang="en-DE" sz="1800" b="1" dirty="0"/>
           </a:p>
         </p:txBody>
       </p:sp>
@@ -21307,139 +21341,83 @@
         </p:nvSpPr>
         <p:spPr>
           <a:xfrm>
-            <a:off x="332362" y="2291641"/>
-            <a:ext cx="4958966" cy="3917773"/>
+            <a:off x="214791" y="1993112"/>
+            <a:ext cx="4424715" cy="3989130"/>
           </a:xfrm>
         </p:spPr>
         <p:txBody>
           <a:bodyPr>
-            <a:normAutofit/>
+            <a:noAutofit/>
           </a:bodyPr>
           <a:lstStyle/>
           <a:p>
             <a:r>
-              <a:rPr lang="de-DE" sz="1400" b="1" dirty="0"/>
-              <a:t>Project Goal:</a:t>
+              <a:rPr lang="de-DE" sz="1200" b="1" dirty="0"/>
+              <a:t>Objective: </a:t>
             </a:r>
             <a:r>
-              <a:rPr lang="de-DE" sz="1400" dirty="0"/>
-              <a:t> Design a ROS-based multi-robot system using TurtleBot3 Burgers in a Gazebo simulation.</a:t>
+              <a:rPr lang="en-US" sz="1100" dirty="0"/>
+              <a:t>Develop a ROS2-based Multi-Robot TurtleBot3 Burger Convoy System in a Gazebo simulation environment where multiple robots operate in a coordinated leader–follower formation. </a:t>
             </a:r>
           </a:p>
           <a:p>
             <a:r>
-              <a:rPr lang="de-DE" sz="1400" b="1" dirty="0"/>
-              <a:t>System Behavior (Leader-Follower):</a:t>
-            </a:r>
-            <a:endParaRPr lang="de-DE" sz="1400" dirty="0"/>
-          </a:p>
-          <a:p>
-            <a:pPr lvl="1"/>
-            <a:r>
-              <a:rPr lang="de-DE" sz="1400" b="1" dirty="0"/>
-              <a:t>Robot 1 (Leader):</a:t>
-            </a:r>
-            <a:r>
-              <a:rPr lang="de-DE" sz="1400" dirty="0"/>
-              <a:t> Manually controlled via standard ROS teleoperation.</a:t>
+              <a:rPr lang="de-DE" sz="1100" b="1" dirty="0"/>
+              <a:t>System Behavior</a:t>
             </a:r>
           </a:p>
           <a:p>
             <a:pPr lvl="1"/>
             <a:r>
-              <a:rPr lang="de-DE" sz="1400" b="1" dirty="0"/>
-              <a:t>Robots 2 &amp; 3 (Followers):</a:t>
+              <a:rPr lang="en-DE" sz="1100" dirty="0"/>
+              <a:t> </a:t>
             </a:r>
             <a:r>
-              <a:rPr lang="de-DE" sz="1400" dirty="0"/>
-              <a:t> Autonomously follow the preceding robot using onboard </a:t>
+              <a:rPr lang="de-DE" sz="1100" b="1" dirty="0"/>
+              <a:t>Robot 1 (Leader): </a:t>
             </a:r>
             <a:r>
-              <a:rPr lang="de-DE" sz="1400" b="1" dirty="0"/>
-              <a:t>LiDAR (LaserScan)</a:t>
-            </a:r>
-            <a:r>
-              <a:rPr lang="de-DE" sz="1400" dirty="0"/>
-              <a:t> data.</a:t>
-            </a:r>
-          </a:p>
-          <a:p>
-            <a:r>
-              <a:rPr lang="de-DE" sz="1400" b="1" dirty="0"/>
-              <a:t>Core Objectives:</a:t>
-            </a:r>
-            <a:endParaRPr lang="de-DE" sz="1400" dirty="0"/>
-          </a:p>
-          <a:p>
-            <a:pPr lvl="1"/>
-            <a:r>
-              <a:rPr lang="de-DE" sz="1400" dirty="0"/>
-              <a:t>Maintain stable coordinated convoy formation.</a:t>
+              <a:rPr lang="de-DE" sz="1100" dirty="0"/>
+              <a:t>Manually controlled through teleoperation</a:t>
             </a:r>
           </a:p>
           <a:p>
             <a:pPr lvl="1"/>
             <a:r>
-              <a:rPr lang="de-DE" sz="1400" dirty="0"/>
-              <a:t>Ensure safe inter-robot spacing and velocity control.</a:t>
+              <a:rPr lang="en-DE" sz="1100" dirty="0"/>
+              <a:t> </a:t>
+            </a:r>
+            <a:r>
+              <a:rPr lang="de-DE" sz="1100" b="1" dirty="0"/>
+              <a:t>Robot 2 &amp; Robot 3 (Followers): </a:t>
+            </a:r>
+            <a:r>
+              <a:rPr lang="de-DE" sz="1100" dirty="0"/>
+              <a:t>Autonomously follow the robot ahead </a:t>
+            </a:r>
+          </a:p>
+          <a:p>
+            <a:r>
+              <a:rPr lang="en-US" sz="1100" b="1" dirty="0"/>
+              <a:t>Operating Environments</a:t>
             </a:r>
           </a:p>
           <a:p>
             <a:pPr lvl="1"/>
             <a:r>
-              <a:rPr lang="de-DE" sz="1400" dirty="0"/>
-              <a:t>Enable collision-free navigation in both empty worlds </a:t>
-            </a:r>
-            <a:br>
-              <a:rPr lang="de-DE" sz="1400" dirty="0"/>
-            </a:br>
-            <a:r>
-              <a:rPr lang="de-DE" sz="1400" dirty="0"/>
-              <a:t>and environments with static obstacles </a:t>
-            </a:r>
-            <a:br>
-              <a:rPr lang="de-DE" sz="1400" dirty="0"/>
-            </a:br>
-            <a:r>
-              <a:rPr lang="de-DE" sz="1400" dirty="0"/>
-              <a:t>(columns/pillars).</a:t>
+              <a:rPr lang="en-US" sz="1100" dirty="0"/>
+              <a:t>Empty simulation world</a:t>
             </a:r>
           </a:p>
           <a:p>
-            <a:endParaRPr lang="en-DE" sz="1400" dirty="0"/>
+            <a:pPr lvl="1"/>
+            <a:r>
+              <a:rPr lang="en-US" sz="1100" dirty="0"/>
+              <a:t>Obstacle world (columns/pillars)</a:t>
+            </a:r>
           </a:p>
         </p:txBody>
       </p:sp>
-      <p:pic>
-        <p:nvPicPr>
-          <p:cNvPr id="9" name="Picture 8">
-            <a:extLst>
-              <a:ext uri="{FF2B5EF4-FFF2-40B4-BE49-F238E27FC236}">
-                <a16:creationId xmlns:a16="http://schemas.microsoft.com/office/drawing/2014/main" id="{86324B58-2083-D203-C6A1-588AE60FAD69}"/>
-              </a:ext>
-            </a:extLst>
-          </p:cNvPr>
-          <p:cNvPicPr>
-            <a:picLocks noChangeAspect="1"/>
-          </p:cNvPicPr>
-          <p:nvPr/>
-        </p:nvPicPr>
-        <p:blipFill>
-          <a:blip r:embed="rId2"/>
-          <a:stretch>
-            <a:fillRect/>
-          </a:stretch>
-        </p:blipFill>
-        <p:spPr>
-          <a:xfrm>
-            <a:off x="5381623" y="2141191"/>
-            <a:ext cx="6624905" cy="3849958"/>
-          </a:xfrm>
-          <a:prstGeom prst="rect">
-            <a:avLst/>
-          </a:prstGeom>
-        </p:spPr>
-      </p:pic>
       <p:sp>
         <p:nvSpPr>
           <p:cNvPr id="18" name="Freeform: Shape 17">
@@ -23256,6 +23234,409 @@
           <a:p>
             <a:pPr algn="ctr"/>
             <a:endParaRPr lang="en-US"/>
+          </a:p>
+        </p:txBody>
+      </p:sp>
+      <p:pic>
+        <p:nvPicPr>
+          <p:cNvPr id="4" name="Picture 3">
+            <a:extLst>
+              <a:ext uri="{FF2B5EF4-FFF2-40B4-BE49-F238E27FC236}">
+                <a16:creationId xmlns:a16="http://schemas.microsoft.com/office/drawing/2014/main" id="{FA2C4732-1936-D993-6767-63A93DC1290E}"/>
+              </a:ext>
+            </a:extLst>
+          </p:cNvPr>
+          <p:cNvPicPr>
+            <a:picLocks noChangeAspect="1"/>
+          </p:cNvPicPr>
+          <p:nvPr/>
+        </p:nvPicPr>
+        <p:blipFill>
+          <a:blip r:embed="rId2"/>
+          <a:stretch>
+            <a:fillRect/>
+          </a:stretch>
+        </p:blipFill>
+        <p:spPr>
+          <a:xfrm>
+            <a:off x="6096000" y="1135328"/>
+            <a:ext cx="6021311" cy="3943698"/>
+          </a:xfrm>
+          <a:prstGeom prst="rect">
+            <a:avLst/>
+          </a:prstGeom>
+        </p:spPr>
+      </p:pic>
+      <p:sp>
+        <p:nvSpPr>
+          <p:cNvPr id="5" name="TextBox 4">
+            <a:extLst>
+              <a:ext uri="{FF2B5EF4-FFF2-40B4-BE49-F238E27FC236}">
+                <a16:creationId xmlns:a16="http://schemas.microsoft.com/office/drawing/2014/main" id="{20BBAC2C-F74F-6C15-5772-2ACBDCC67F5F}"/>
+              </a:ext>
+            </a:extLst>
+          </p:cNvPr>
+          <p:cNvSpPr txBox="1"/>
+          <p:nvPr/>
+        </p:nvSpPr>
+        <p:spPr>
+          <a:xfrm>
+            <a:off x="9315464" y="5079027"/>
+            <a:ext cx="2344301" cy="307777"/>
+          </a:xfrm>
+          <a:prstGeom prst="rect">
+            <a:avLst/>
+          </a:prstGeom>
+          <a:noFill/>
+        </p:spPr>
+        <p:txBody>
+          <a:bodyPr wrap="square" rtlCol="0">
+            <a:spAutoFit/>
+          </a:bodyPr>
+          <a:lstStyle/>
+          <a:p>
+            <a:r>
+              <a:rPr lang="en-US" sz="1400" dirty="0"/>
+              <a:t>Image Generated by Gemini</a:t>
+            </a:r>
+            <a:endParaRPr lang="en-DE" sz="1400" dirty="0"/>
+          </a:p>
+        </p:txBody>
+      </p:sp>
+      <p:sp>
+        <p:nvSpPr>
+          <p:cNvPr id="6" name="Content Placeholder 2">
+            <a:extLst>
+              <a:ext uri="{FF2B5EF4-FFF2-40B4-BE49-F238E27FC236}">
+                <a16:creationId xmlns:a16="http://schemas.microsoft.com/office/drawing/2014/main" id="{4AB65E0D-ABA5-16F2-607C-FEB06A1C278C}"/>
+              </a:ext>
+            </a:extLst>
+          </p:cNvPr>
+          <p:cNvSpPr txBox="1">
+            <a:spLocks/>
+          </p:cNvSpPr>
+          <p:nvPr/>
+        </p:nvSpPr>
+        <p:spPr>
+          <a:xfrm>
+            <a:off x="119386" y="4525181"/>
+            <a:ext cx="7312415" cy="2648870"/>
+          </a:xfrm>
+          <a:prstGeom prst="rect">
+            <a:avLst/>
+          </a:prstGeom>
+        </p:spPr>
+        <p:txBody>
+          <a:bodyPr vert="horz" lIns="91440" tIns="45720" rIns="91440" bIns="45720" numCol="2" rtlCol="0">
+            <a:normAutofit/>
+          </a:bodyPr>
+          <a:lstStyle>
+            <a:lvl1pPr marL="228600" indent="-228600" algn="l" defTabSz="914400" rtl="0" eaLnBrk="1" latinLnBrk="0" hangingPunct="1">
+              <a:lnSpc>
+                <a:spcPct val="90000"/>
+              </a:lnSpc>
+              <a:spcBef>
+                <a:spcPts val="1000"/>
+              </a:spcBef>
+              <a:buFont typeface="Arial" panose="020B0604020202020204" pitchFamily="34" charset="0"/>
+              <a:buChar char="•"/>
+              <a:defRPr sz="2800" kern="1200">
+                <a:solidFill>
+                  <a:schemeClr val="tx1"/>
+                </a:solidFill>
+                <a:latin typeface="+mn-lt"/>
+                <a:ea typeface="+mn-ea"/>
+                <a:cs typeface="+mn-cs"/>
+              </a:defRPr>
+            </a:lvl1pPr>
+            <a:lvl2pPr marL="685800" indent="-228600" algn="l" defTabSz="914400" rtl="0" eaLnBrk="1" latinLnBrk="0" hangingPunct="1">
+              <a:lnSpc>
+                <a:spcPct val="90000"/>
+              </a:lnSpc>
+              <a:spcBef>
+                <a:spcPts val="500"/>
+              </a:spcBef>
+              <a:buFont typeface="Arial" panose="020B0604020202020204" pitchFamily="34" charset="0"/>
+              <a:buChar char="•"/>
+              <a:defRPr sz="2400" kern="1200">
+                <a:solidFill>
+                  <a:schemeClr val="tx1"/>
+                </a:solidFill>
+                <a:latin typeface="+mn-lt"/>
+                <a:ea typeface="+mn-ea"/>
+                <a:cs typeface="+mn-cs"/>
+              </a:defRPr>
+            </a:lvl2pPr>
+            <a:lvl3pPr marL="1143000" indent="-228600" algn="l" defTabSz="914400" rtl="0" eaLnBrk="1" latinLnBrk="0" hangingPunct="1">
+              <a:lnSpc>
+                <a:spcPct val="90000"/>
+              </a:lnSpc>
+              <a:spcBef>
+                <a:spcPts val="500"/>
+              </a:spcBef>
+              <a:buFont typeface="Arial" panose="020B0604020202020204" pitchFamily="34" charset="0"/>
+              <a:buChar char="•"/>
+              <a:defRPr sz="2000" kern="1200">
+                <a:solidFill>
+                  <a:schemeClr val="tx1"/>
+                </a:solidFill>
+                <a:latin typeface="+mn-lt"/>
+                <a:ea typeface="+mn-ea"/>
+                <a:cs typeface="+mn-cs"/>
+              </a:defRPr>
+            </a:lvl3pPr>
+            <a:lvl4pPr marL="1600200" indent="-228600" algn="l" defTabSz="914400" rtl="0" eaLnBrk="1" latinLnBrk="0" hangingPunct="1">
+              <a:lnSpc>
+                <a:spcPct val="90000"/>
+              </a:lnSpc>
+              <a:spcBef>
+                <a:spcPts val="500"/>
+              </a:spcBef>
+              <a:buFont typeface="Arial" panose="020B0604020202020204" pitchFamily="34" charset="0"/>
+              <a:buChar char="•"/>
+              <a:defRPr sz="1800" kern="1200">
+                <a:solidFill>
+                  <a:schemeClr val="tx1"/>
+                </a:solidFill>
+                <a:latin typeface="+mn-lt"/>
+                <a:ea typeface="+mn-ea"/>
+                <a:cs typeface="+mn-cs"/>
+              </a:defRPr>
+            </a:lvl4pPr>
+            <a:lvl5pPr marL="2057400" indent="-228600" algn="l" defTabSz="914400" rtl="0" eaLnBrk="1" latinLnBrk="0" hangingPunct="1">
+              <a:lnSpc>
+                <a:spcPct val="90000"/>
+              </a:lnSpc>
+              <a:spcBef>
+                <a:spcPts val="500"/>
+              </a:spcBef>
+              <a:buFont typeface="Arial" panose="020B0604020202020204" pitchFamily="34" charset="0"/>
+              <a:buChar char="•"/>
+              <a:defRPr sz="1800" kern="1200">
+                <a:solidFill>
+                  <a:schemeClr val="tx1"/>
+                </a:solidFill>
+                <a:latin typeface="+mn-lt"/>
+                <a:ea typeface="+mn-ea"/>
+                <a:cs typeface="+mn-cs"/>
+              </a:defRPr>
+            </a:lvl5pPr>
+            <a:lvl6pPr marL="2514600" indent="-228600" algn="l" defTabSz="914400" rtl="0" eaLnBrk="1" latinLnBrk="0" hangingPunct="1">
+              <a:lnSpc>
+                <a:spcPct val="90000"/>
+              </a:lnSpc>
+              <a:spcBef>
+                <a:spcPts val="500"/>
+              </a:spcBef>
+              <a:buFont typeface="Arial" panose="020B0604020202020204" pitchFamily="34" charset="0"/>
+              <a:buChar char="•"/>
+              <a:defRPr sz="1800" kern="1200">
+                <a:solidFill>
+                  <a:schemeClr val="tx1"/>
+                </a:solidFill>
+                <a:latin typeface="+mn-lt"/>
+                <a:ea typeface="+mn-ea"/>
+                <a:cs typeface="+mn-cs"/>
+              </a:defRPr>
+            </a:lvl6pPr>
+            <a:lvl7pPr marL="2971800" indent="-228600" algn="l" defTabSz="914400" rtl="0" eaLnBrk="1" latinLnBrk="0" hangingPunct="1">
+              <a:lnSpc>
+                <a:spcPct val="90000"/>
+              </a:lnSpc>
+              <a:spcBef>
+                <a:spcPts val="500"/>
+              </a:spcBef>
+              <a:buFont typeface="Arial" panose="020B0604020202020204" pitchFamily="34" charset="0"/>
+              <a:buChar char="•"/>
+              <a:defRPr sz="1800" kern="1200">
+                <a:solidFill>
+                  <a:schemeClr val="tx1"/>
+                </a:solidFill>
+                <a:latin typeface="+mn-lt"/>
+                <a:ea typeface="+mn-ea"/>
+                <a:cs typeface="+mn-cs"/>
+              </a:defRPr>
+            </a:lvl7pPr>
+            <a:lvl8pPr marL="3429000" indent="-228600" algn="l" defTabSz="914400" rtl="0" eaLnBrk="1" latinLnBrk="0" hangingPunct="1">
+              <a:lnSpc>
+                <a:spcPct val="90000"/>
+              </a:lnSpc>
+              <a:spcBef>
+                <a:spcPts val="500"/>
+              </a:spcBef>
+              <a:buFont typeface="Arial" panose="020B0604020202020204" pitchFamily="34" charset="0"/>
+              <a:buChar char="•"/>
+              <a:defRPr sz="1800" kern="1200">
+                <a:solidFill>
+                  <a:schemeClr val="tx1"/>
+                </a:solidFill>
+                <a:latin typeface="+mn-lt"/>
+                <a:ea typeface="+mn-ea"/>
+                <a:cs typeface="+mn-cs"/>
+              </a:defRPr>
+            </a:lvl8pPr>
+            <a:lvl9pPr marL="3886200" indent="-228600" algn="l" defTabSz="914400" rtl="0" eaLnBrk="1" latinLnBrk="0" hangingPunct="1">
+              <a:lnSpc>
+                <a:spcPct val="90000"/>
+              </a:lnSpc>
+              <a:spcBef>
+                <a:spcPts val="500"/>
+              </a:spcBef>
+              <a:buFont typeface="Arial" panose="020B0604020202020204" pitchFamily="34" charset="0"/>
+              <a:buChar char="•"/>
+              <a:defRPr sz="1800" kern="1200">
+                <a:solidFill>
+                  <a:schemeClr val="tx1"/>
+                </a:solidFill>
+                <a:latin typeface="+mn-lt"/>
+                <a:ea typeface="+mn-ea"/>
+                <a:cs typeface="+mn-cs"/>
+              </a:defRPr>
+            </a:lvl9pPr>
+          </a:lstStyle>
+          <a:p>
+            <a:pPr marL="0" indent="0">
+              <a:buFont typeface="Arial" panose="020B0604020202020204" pitchFamily="34" charset="0"/>
+              <a:buNone/>
+            </a:pPr>
+            <a:r>
+              <a:rPr lang="en-US" sz="1100" b="1" dirty="0"/>
+              <a:t> </a:t>
+            </a:r>
+            <a:r>
+              <a:rPr lang="en-US" sz="1200" b="1" dirty="0"/>
+              <a:t>Statement of Work (Scope &amp; Deliverables)</a:t>
+            </a:r>
+            <a:endParaRPr lang="de-DE" sz="1200" b="1" dirty="0"/>
+          </a:p>
+          <a:p>
+            <a:r>
+              <a:rPr lang="de-DE" sz="1100" b="1" dirty="0"/>
+              <a:t>Simulation &amp; Environment Setup</a:t>
+            </a:r>
+            <a:endParaRPr lang="de-DE" sz="1100" dirty="0"/>
+          </a:p>
+          <a:p>
+            <a:pPr lvl="1"/>
+            <a:r>
+              <a:rPr lang="de-DE" sz="1100" dirty="0"/>
+              <a:t>Configure ROS2 Jazzy + Gazebo Harmonic </a:t>
+            </a:r>
+          </a:p>
+          <a:p>
+            <a:pPr lvl="1"/>
+            <a:r>
+              <a:rPr lang="de-DE" sz="1100" dirty="0"/>
+              <a:t>Develop Empty and Pillar worlds </a:t>
+            </a:r>
+          </a:p>
+          <a:p>
+            <a:pPr lvl="1"/>
+            <a:r>
+              <a:rPr lang="de-DE" sz="1100" dirty="0"/>
+              <a:t>Configure ROS–Gazebo topic bridges </a:t>
+            </a:r>
+          </a:p>
+          <a:p>
+            <a:r>
+              <a:rPr lang="de-DE" sz="1100" b="1" dirty="0"/>
+              <a:t>System Architecture</a:t>
+            </a:r>
+            <a:endParaRPr lang="de-DE" sz="1100" dirty="0"/>
+          </a:p>
+          <a:p>
+            <a:pPr lvl="1"/>
+            <a:r>
+              <a:rPr lang="de-DE" sz="1100" dirty="0"/>
+              <a:t>Deploy 1 Leader + 2 Followers </a:t>
+            </a:r>
+          </a:p>
+          <a:p>
+            <a:pPr lvl="1"/>
+            <a:r>
+              <a:rPr lang="de-DE" sz="1100" dirty="0"/>
+              <a:t>Implement namespace isolation </a:t>
+            </a:r>
+          </a:p>
+          <a:p>
+            <a:pPr lvl="1"/>
+            <a:r>
+              <a:rPr lang="de-DE" sz="1100" dirty="0"/>
+              <a:t>Configure launch framework and robot spawning </a:t>
+            </a:r>
+          </a:p>
+          <a:p>
+            <a:pPr lvl="1"/>
+            <a:endParaRPr lang="de-DE" sz="1100" dirty="0"/>
+          </a:p>
+          <a:p>
+            <a:r>
+              <a:rPr lang="de-DE" sz="1100" b="1" dirty="0"/>
+              <a:t>ROS Node Development</a:t>
+            </a:r>
+            <a:endParaRPr lang="de-DE" sz="1100" dirty="0"/>
+          </a:p>
+          <a:p>
+            <a:pPr lvl="1"/>
+            <a:r>
+              <a:rPr lang="de-DE" sz="1100" dirty="0"/>
+              <a:t>teleop_controller.py</a:t>
+            </a:r>
+          </a:p>
+          <a:p>
+            <a:pPr lvl="1"/>
+            <a:r>
+              <a:rPr lang="de-DE" sz="1100" dirty="0"/>
+              <a:t>follower_node.py</a:t>
+            </a:r>
+          </a:p>
+          <a:p>
+            <a:pPr lvl="1"/>
+            <a:r>
+              <a:rPr lang="de-DE" sz="1100" dirty="0"/>
+              <a:t>laser_processor.py</a:t>
+            </a:r>
+          </a:p>
+          <a:p>
+            <a:pPr lvl="1"/>
+            <a:r>
+              <a:rPr lang="de-DE" sz="1100" dirty="0"/>
+              <a:t>safety_controller.py </a:t>
+            </a:r>
+          </a:p>
+          <a:p>
+            <a:r>
+              <a:rPr lang="de-DE" sz="1100" b="1" dirty="0"/>
+              <a:t>Perception &amp; Control</a:t>
+            </a:r>
+          </a:p>
+          <a:p>
+            <a:pPr lvl="1"/>
+            <a:r>
+              <a:rPr lang="de-DE" sz="1100" dirty="0"/>
+              <a:t>LiDAR data processing </a:t>
+            </a:r>
+          </a:p>
+          <a:p>
+            <a:pPr lvl="1"/>
+            <a:r>
+              <a:rPr lang="de-DE" sz="1100" dirty="0"/>
+              <a:t>Target identification and tracking </a:t>
+            </a:r>
+          </a:p>
+          <a:p>
+            <a:pPr lvl="1"/>
+            <a:r>
+              <a:rPr lang="de-DE" sz="1100" dirty="0"/>
+              <a:t>Obstacle rejection logic</a:t>
+            </a:r>
+          </a:p>
+          <a:p>
+            <a:pPr lvl="1"/>
+            <a:r>
+              <a:rPr lang="de-DE" sz="1100" dirty="0"/>
+              <a:t>Safety and collision avoidance</a:t>
+            </a:r>
           </a:p>
         </p:txBody>
       </p:sp>
@@ -25742,35 +26123,33 @@
         </p:nvSpPr>
         <p:spPr>
           <a:xfrm>
-            <a:off x="1137036" y="548640"/>
-            <a:ext cx="9543405" cy="1188720"/>
+            <a:off x="165697" y="289959"/>
+            <a:ext cx="10500258" cy="1534986"/>
           </a:xfrm>
         </p:spPr>
         <p:txBody>
           <a:bodyPr>
-            <a:normAutofit/>
+            <a:noAutofit/>
           </a:bodyPr>
           <a:lstStyle/>
           <a:p>
             <a:r>
-              <a:rPr lang="de-DE">
-                <a:solidFill>
-                  <a:schemeClr val="tx1">
-                    <a:lumMod val="85000"/>
-                    <a:lumOff val="15000"/>
-                  </a:schemeClr>
-                </a:solidFill>
-              </a:rPr>
-              <a:t>Target vs. Obstacle Differentiation</a:t>
+              <a:rPr lang="en-US" sz="2000" b="1" dirty="0"/>
+              <a:t>Technical Scope, Deliverables &amp; Expected Outcome Core Technical Challenge</a:t>
             </a:r>
-            <a:endParaRPr lang="en-DE">
-              <a:solidFill>
-                <a:schemeClr val="tx1">
-                  <a:lumMod val="85000"/>
-                  <a:lumOff val="15000"/>
-                </a:schemeClr>
-              </a:solidFill>
-            </a:endParaRPr>
+            <a:br>
+              <a:rPr lang="en-US" sz="2000" dirty="0"/>
+            </a:br>
+            <a:br>
+              <a:rPr lang="en-US" sz="2000" dirty="0"/>
+            </a:br>
+            <a:br>
+              <a:rPr lang="en-US" sz="2000" b="1" dirty="0"/>
+            </a:br>
+            <a:br>
+              <a:rPr lang="en-US" sz="2000" b="1" dirty="0"/>
+            </a:br>
+            <a:endParaRPr lang="en-US" sz="2000" dirty="0"/>
           </a:p>
         </p:txBody>
       </p:sp>
@@ -25792,195 +26171,154 @@
         </p:nvSpPr>
         <p:spPr>
           <a:xfrm>
-            <a:off x="1663259" y="1953486"/>
-            <a:ext cx="8865481" cy="3542507"/>
+            <a:off x="1159877" y="2196791"/>
+            <a:ext cx="10799216" cy="3999404"/>
           </a:xfrm>
         </p:spPr>
         <p:txBody>
-          <a:bodyPr anchor="ctr">
-            <a:normAutofit/>
+          <a:bodyPr numCol="2" anchor="ctr">
+            <a:noAutofit/>
           </a:bodyPr>
           <a:lstStyle/>
           <a:p>
             <a:r>
-              <a:rPr lang="en-US" sz="1300" b="1" dirty="0">
-                <a:solidFill>
-                  <a:schemeClr val="tx1">
-                    <a:lumMod val="85000"/>
-                    <a:lumOff val="15000"/>
-                  </a:schemeClr>
-                </a:solidFill>
-              </a:rPr>
-              <a:t>The Key Challenge:</a:t>
+              <a:rPr lang="de-DE" sz="1400" b="1" dirty="0"/>
+              <a:t>Deliverables </a:t>
             </a:r>
             <a:r>
-              <a:rPr lang="en-US" sz="1300" dirty="0">
-                <a:solidFill>
-                  <a:schemeClr val="tx1">
-                    <a:lumMod val="85000"/>
-                    <a:lumOff val="15000"/>
-                  </a:schemeClr>
-                </a:solidFill>
-              </a:rPr>
-              <a:t> Reliably distinguishing between the dynamic leader and static environmental obstacles using </a:t>
+              <a:rPr lang="en-DE" sz="1400" dirty="0"/>
+              <a:t>📦</a:t>
             </a:r>
-            <a:r>
-              <a:rPr lang="en-US" sz="1300" b="1" dirty="0">
-                <a:solidFill>
-                  <a:schemeClr val="tx1">
-                    <a:lumMod val="85000"/>
-                    <a:lumOff val="15000"/>
-                  </a:schemeClr>
-                </a:solidFill>
-              </a:rPr>
-              <a:t>only</a:t>
-            </a:r>
-            <a:r>
-              <a:rPr lang="en-US" sz="1300" dirty="0">
-                <a:solidFill>
-                  <a:schemeClr val="tx1">
-                    <a:lumMod val="85000"/>
-                    <a:lumOff val="15000"/>
-                  </a:schemeClr>
-                </a:solidFill>
-              </a:rPr>
-              <a:t> LiDAR data, preventing followers from falsely tracking walls or columns.</a:t>
-            </a:r>
-          </a:p>
-          <a:p>
-            <a:r>
-              <a:rPr lang="en-US" sz="1300" b="1" dirty="0">
-                <a:solidFill>
-                  <a:schemeClr val="tx1">
-                    <a:lumMod val="85000"/>
-                    <a:lumOff val="15000"/>
-                  </a:schemeClr>
-                </a:solidFill>
-              </a:rPr>
-              <a:t>Moving Target (Lead Robot):</a:t>
-            </a:r>
-            <a:endParaRPr lang="en-US" sz="1300" dirty="0">
-              <a:solidFill>
-                <a:schemeClr val="tx1">
-                  <a:lumMod val="85000"/>
-                  <a:lumOff val="15000"/>
-                </a:schemeClr>
-              </a:solidFill>
-            </a:endParaRPr>
+            <a:endParaRPr lang="de-DE" sz="1400" b="1" dirty="0"/>
           </a:p>
           <a:p>
             <a:pPr lvl="1"/>
             <a:r>
-              <a:rPr lang="en-US" sz="1300" dirty="0">
-                <a:solidFill>
-                  <a:schemeClr val="tx1">
-                    <a:lumMod val="85000"/>
-                    <a:lumOff val="15000"/>
-                  </a:schemeClr>
-                </a:solidFill>
-              </a:rPr>
-              <a:t>Dynamic motion pattern that changes position over time.</a:t>
+              <a:rPr lang="de-DE" sz="1400" dirty="0"/>
+              <a:t>ROS workspace and source code</a:t>
             </a:r>
           </a:p>
           <a:p>
             <a:pPr lvl="1"/>
             <a:r>
-              <a:rPr lang="en-US" sz="1300" dirty="0">
-                <a:solidFill>
-                  <a:schemeClr val="tx1">
-                    <a:lumMod val="85000"/>
-                    <a:lumOff val="15000"/>
-                  </a:schemeClr>
-                </a:solidFill>
-              </a:rPr>
-              <a:t>Must be consistently identified and tracked as the primary reference.</a:t>
+              <a:rPr lang="de-DE" sz="1400" dirty="0"/>
+              <a:t>Gazebo simulation worlds</a:t>
             </a:r>
-          </a:p>
-          <a:p>
-            <a:r>
-              <a:rPr lang="en-US" sz="1300" b="1" dirty="0">
-                <a:solidFill>
-                  <a:schemeClr val="tx1">
-                    <a:lumMod val="85000"/>
-                    <a:lumOff val="15000"/>
-                  </a:schemeClr>
-                </a:solidFill>
-              </a:rPr>
-              <a:t>Static Objects (Environment):</a:t>
-            </a:r>
-            <a:endParaRPr lang="en-US" sz="1300" dirty="0">
-              <a:solidFill>
-                <a:schemeClr val="tx1">
-                  <a:lumMod val="85000"/>
-                  <a:lumOff val="15000"/>
-                </a:schemeClr>
-              </a:solidFill>
-            </a:endParaRPr>
           </a:p>
           <a:p>
             <a:pPr lvl="1"/>
             <a:r>
-              <a:rPr lang="en-US" sz="1300" dirty="0">
-                <a:solidFill>
-                  <a:schemeClr val="tx1">
-                    <a:lumMod val="85000"/>
-                    <a:lumOff val="15000"/>
-                  </a:schemeClr>
-                </a:solidFill>
-              </a:rPr>
-              <a:t>Stationary structures treated strictly as obstacles to avoid.</a:t>
+              <a:rPr lang="de-DE" sz="1400" dirty="0"/>
+              <a:t>Multi-robot ROS nodes/packages</a:t>
             </a:r>
-          </a:p>
-          <a:p>
-            <a:r>
-              <a:rPr lang="en-US" sz="1300" b="1" dirty="0">
-                <a:solidFill>
-                  <a:schemeClr val="tx1">
-                    <a:lumMod val="85000"/>
-                    <a:lumOff val="15000"/>
-                  </a:schemeClr>
-                </a:solidFill>
-              </a:rPr>
-              <a:t>Required Distinction Logic:</a:t>
-            </a:r>
-            <a:endParaRPr lang="en-US" sz="1300" dirty="0">
-              <a:solidFill>
-                <a:schemeClr val="tx1">
-                  <a:lumMod val="85000"/>
-                  <a:lumOff val="15000"/>
-                </a:schemeClr>
-              </a:solidFill>
-            </a:endParaRPr>
           </a:p>
           <a:p>
             <a:pPr lvl="1"/>
             <a:r>
-              <a:rPr lang="en-US" sz="1300" dirty="0">
-                <a:solidFill>
-                  <a:schemeClr val="tx1">
-                    <a:lumMod val="85000"/>
-                    <a:lumOff val="15000"/>
-                  </a:schemeClr>
-                </a:solidFill>
-              </a:rPr>
-              <a:t>Combine distance continuity over time, angular position consistency, and motion-based filtering to separate dynamic tracking from static LiDAR returns.</a:t>
+              <a:rPr lang="de-DE" sz="1400" dirty="0"/>
+              <a:t>System documentation</a:t>
             </a:r>
           </a:p>
           <a:p>
+            <a:pPr lvl="1"/>
             <a:r>
-              <a:rPr lang="en-US" sz="1300" dirty="0">
-                <a:solidFill>
-                  <a:schemeClr val="tx1">
-                    <a:lumMod val="85000"/>
-                    <a:lumOff val="15000"/>
-                  </a:schemeClr>
-                </a:solidFill>
-              </a:rPr>
-              <a:t>This structure highlights the core requirements on the first slide and emphasizes the main technical challenge (LiDAR discrimination) on the second slide, keeping the text concise and presentation-friendly.</a:t>
+              <a:rPr lang="de-DE" sz="1400" dirty="0"/>
+              <a:t>Test results and performance evaluation</a:t>
             </a:r>
           </a:p>
           <a:p>
-            <a:endParaRPr lang="en-DE" sz="1300" dirty="0">
+            <a:pPr lvl="1"/>
+            <a:r>
+              <a:rPr lang="de-DE" sz="1400" dirty="0"/>
+              <a:t>Final presentation and demonstrations</a:t>
+            </a:r>
+          </a:p>
+          <a:p>
+            <a:pPr lvl="1"/>
+            <a:endParaRPr lang="de-DE" sz="1400" dirty="0"/>
+          </a:p>
+          <a:p>
+            <a:pPr lvl="1"/>
+            <a:endParaRPr lang="de-DE" sz="1400" dirty="0"/>
+          </a:p>
+          <a:p>
+            <a:pPr lvl="1"/>
+            <a:endParaRPr lang="de-DE" sz="1400" dirty="0"/>
+          </a:p>
+          <a:p>
+            <a:endParaRPr lang="de-DE" sz="1400" dirty="0"/>
+          </a:p>
+          <a:p>
+            <a:endParaRPr lang="de-DE" sz="1400" dirty="0"/>
+          </a:p>
+          <a:p>
+            <a:endParaRPr lang="de-DE" sz="1400" dirty="0"/>
+          </a:p>
+          <a:p>
+            <a:pPr marL="0" indent="0">
+              <a:buNone/>
+            </a:pPr>
+            <a:endParaRPr lang="de-DE" sz="1400" dirty="0"/>
+          </a:p>
+          <a:p>
+            <a:r>
+              <a:rPr lang="de-DE" sz="1400" b="1" dirty="0"/>
+              <a:t>Success Criteria </a:t>
+            </a:r>
+            <a:r>
+              <a:rPr lang="en-DE" sz="1400" dirty="0"/>
+              <a:t>✅ </a:t>
+            </a:r>
+            <a:endParaRPr lang="de-DE" sz="1400" b="1" dirty="0"/>
+          </a:p>
+          <a:p>
+            <a:pPr lvl="1"/>
+            <a:r>
+              <a:rPr lang="de-DE" sz="1400" dirty="0"/>
+              <a:t>Robot 1 controlled through teleoperation</a:t>
+            </a:r>
+          </a:p>
+          <a:p>
+            <a:pPr lvl="1"/>
+            <a:r>
+              <a:rPr lang="de-DE" sz="1400" dirty="0"/>
+              <a:t>Robot 2 &amp; Robot 3 correctly follow preceding robot</a:t>
+            </a:r>
+          </a:p>
+          <a:p>
+            <a:pPr lvl="1"/>
+            <a:r>
+              <a:rPr lang="de-DE" sz="1400" dirty="0"/>
+              <a:t>Dynamic leader distinguished from static obstacles</a:t>
+            </a:r>
+          </a:p>
+          <a:p>
+            <a:pPr lvl="1"/>
+            <a:r>
+              <a:rPr lang="de-DE" sz="1400" dirty="0"/>
+              <a:t>Stable inter-robot distance maintained</a:t>
+            </a:r>
+          </a:p>
+          <a:p>
+            <a:pPr lvl="1"/>
+            <a:r>
+              <a:rPr lang="de-DE" sz="1400" dirty="0"/>
+              <a:t>Collision-free navigation achieved</a:t>
+            </a:r>
+          </a:p>
+          <a:p>
+            <a:pPr lvl="1"/>
+            <a:r>
+              <a:rPr lang="de-DE" sz="1400" dirty="0"/>
+              <a:t>Reliable operation in both simulation environments</a:t>
+            </a:r>
+          </a:p>
+          <a:p>
+            <a:endParaRPr lang="de-DE" sz="1400" b="1" dirty="0"/>
+          </a:p>
+          <a:p>
+            <a:pPr lvl="1"/>
+            <a:endParaRPr lang="en-DE" sz="1400" dirty="0">
               <a:solidFill>
                 <a:schemeClr val="tx1">
                   <a:lumMod val="85000"/>
@@ -27052,21 +27390,144 @@
         </p:nvPicPr>
         <p:blipFill>
           <a:blip r:embed="rId2"/>
-          <a:srcRect l="49975"/>
+          <a:srcRect l="49975" b="9286"/>
           <a:stretch>
             <a:fillRect/>
           </a:stretch>
         </p:blipFill>
         <p:spPr>
           <a:xfrm>
-            <a:off x="3430829" y="5094503"/>
-            <a:ext cx="5215737" cy="1752786"/>
+            <a:off x="2346063" y="4351762"/>
+            <a:ext cx="7239795" cy="2207053"/>
           </a:xfrm>
           <a:prstGeom prst="rect">
             <a:avLst/>
           </a:prstGeom>
         </p:spPr>
       </p:pic>
+      <p:sp>
+        <p:nvSpPr>
+          <p:cNvPr id="4" name="TextBox 3">
+            <a:extLst>
+              <a:ext uri="{FF2B5EF4-FFF2-40B4-BE49-F238E27FC236}">
+                <a16:creationId xmlns:a16="http://schemas.microsoft.com/office/drawing/2014/main" id="{5B120FEC-1641-BDEE-E0BC-B6DF20E14948}"/>
+              </a:ext>
+            </a:extLst>
+          </p:cNvPr>
+          <p:cNvSpPr txBox="1"/>
+          <p:nvPr/>
+        </p:nvSpPr>
+        <p:spPr>
+          <a:xfrm>
+            <a:off x="564595" y="725505"/>
+            <a:ext cx="6290337" cy="1323439"/>
+          </a:xfrm>
+          <a:prstGeom prst="rect">
+            <a:avLst/>
+          </a:prstGeom>
+          <a:noFill/>
+        </p:spPr>
+        <p:txBody>
+          <a:bodyPr wrap="square" numCol="2" rtlCol="0">
+            <a:spAutoFit/>
+          </a:bodyPr>
+          <a:lstStyle/>
+          <a:p>
+            <a:r>
+              <a:rPr lang="en-US" sz="1600" b="1" dirty="0"/>
+              <a:t>Differentiate between:</a:t>
+            </a:r>
+            <a:br>
+              <a:rPr lang="en-US" sz="1600" b="1" dirty="0"/>
+            </a:br>
+            <a:r>
+              <a:rPr lang="en-US" sz="1600" b="1" dirty="0"/>
+              <a:t>Dynamic Target</a:t>
+            </a:r>
+            <a:br>
+              <a:rPr lang="en-US" sz="1600" dirty="0"/>
+            </a:br>
+            <a:r>
+              <a:rPr lang="en-US" sz="1600" dirty="0"/>
+              <a:t>Lead robot </a:t>
+            </a:r>
+            <a:br>
+              <a:rPr lang="en-US" sz="1600" dirty="0"/>
+            </a:br>
+            <a:r>
+              <a:rPr lang="en-US" sz="1600" dirty="0"/>
+              <a:t>Moving object </a:t>
+            </a:r>
+            <a:br>
+              <a:rPr lang="en-US" sz="1600" dirty="0"/>
+            </a:br>
+            <a:r>
+              <a:rPr lang="en-US" sz="1600" dirty="0"/>
+              <a:t>Primary tracking reference </a:t>
+            </a:r>
+          </a:p>
+          <a:p>
+            <a:br>
+              <a:rPr lang="en-US" sz="1600" dirty="0"/>
+            </a:br>
+            <a:r>
+              <a:rPr lang="en-US" sz="1600" b="1" dirty="0"/>
+              <a:t>Static Objects</a:t>
+            </a:r>
+            <a:br>
+              <a:rPr lang="en-US" sz="1600" dirty="0"/>
+            </a:br>
+            <a:r>
+              <a:rPr lang="en-US" sz="1600" dirty="0"/>
+              <a:t>Walls, columns, pillars </a:t>
+            </a:r>
+            <a:br>
+              <a:rPr lang="en-US" sz="1600" dirty="0"/>
+            </a:br>
+            <a:r>
+              <a:rPr lang="en-US" sz="1600" dirty="0"/>
+              <a:t>Must be treated as obstacles</a:t>
+            </a:r>
+            <a:endParaRPr lang="en-DE" sz="1600" dirty="0"/>
+          </a:p>
+        </p:txBody>
+      </p:sp>
+      <p:sp>
+        <p:nvSpPr>
+          <p:cNvPr id="6" name="TextBox 5">
+            <a:extLst>
+              <a:ext uri="{FF2B5EF4-FFF2-40B4-BE49-F238E27FC236}">
+                <a16:creationId xmlns:a16="http://schemas.microsoft.com/office/drawing/2014/main" id="{477E72BA-6D7E-C5E4-8BA4-FC1B13A4C908}"/>
+              </a:ext>
+            </a:extLst>
+          </p:cNvPr>
+          <p:cNvSpPr txBox="1"/>
+          <p:nvPr/>
+        </p:nvSpPr>
+        <p:spPr>
+          <a:xfrm>
+            <a:off x="4995078" y="6519484"/>
+            <a:ext cx="2344301" cy="307777"/>
+          </a:xfrm>
+          <a:prstGeom prst="rect">
+            <a:avLst/>
+          </a:prstGeom>
+          <a:noFill/>
+        </p:spPr>
+        <p:txBody>
+          <a:bodyPr wrap="square" rtlCol="0">
+            <a:spAutoFit/>
+          </a:bodyPr>
+          <a:lstStyle/>
+          <a:p>
+            <a:r>
+              <a:rPr lang="en-US" sz="1400" dirty="0"/>
+              <a:t>Image Generated by Gemini</a:t>
+            </a:r>
+            <a:endParaRPr lang="en-DE" sz="1400" dirty="0"/>
+          </a:p>
+        </p:txBody>
+      </p:sp>
     </p:spTree>
     <p:extLst>
       <p:ext uri="{BB962C8B-B14F-4D97-AF65-F5344CB8AC3E}">
